--- a/crypto_01_intro.pptx
+++ b/crypto_01_intro.pptx
@@ -5,7 +5,7 @@
     <p:sldMasterId id="2147483834" r:id="rId1"/>
   </p:sldMasterIdLst>
   <p:notesMasterIdLst>
-    <p:notesMasterId r:id="rId16"/>
+    <p:notesMasterId r:id="rId17"/>
   </p:notesMasterIdLst>
   <p:sldIdLst>
     <p:sldId id="299" r:id="rId2"/>
@@ -22,6 +22,7 @@
     <p:sldId id="258" r:id="rId13"/>
     <p:sldId id="259" r:id="rId14"/>
     <p:sldId id="288" r:id="rId15"/>
+    <p:sldId id="303" r:id="rId16"/>
   </p:sldIdLst>
   <p:sldSz cx="12192000" cy="6858000"/>
   <p:notesSz cx="6858000" cy="9144000"/>
@@ -976,7 +977,7 @@
           <a:lstStyle/>
           <a:p>
             <a:fld id="{EB1FAE4C-5332-014D-8E1B-BB8DA73EF81D}" type="datetimeFigureOut">
-              <a:t>4/13/22</a:t>
+              <a:t>5/5/22</a:t>
             </a:fld>
             <a:endParaRPr lang="en-US"/>
           </a:p>
@@ -1145,7 +1146,7 @@
           <a:lstStyle/>
           <a:p>
             <a:fld id="{EB1FAE4C-5332-014D-8E1B-BB8DA73EF81D}" type="datetimeFigureOut">
-              <a:t>4/13/22</a:t>
+              <a:t>5/5/22</a:t>
             </a:fld>
             <a:endParaRPr lang="en-US"/>
           </a:p>
@@ -1324,7 +1325,7 @@
           <a:lstStyle/>
           <a:p>
             <a:fld id="{EB1FAE4C-5332-014D-8E1B-BB8DA73EF81D}" type="datetimeFigureOut">
-              <a:t>4/13/22</a:t>
+              <a:t>5/5/22</a:t>
             </a:fld>
             <a:endParaRPr lang="en-US"/>
           </a:p>
@@ -1493,7 +1494,7 @@
           <a:lstStyle/>
           <a:p>
             <a:fld id="{EB1FAE4C-5332-014D-8E1B-BB8DA73EF81D}" type="datetimeFigureOut">
-              <a:t>4/13/22</a:t>
+              <a:t>5/5/22</a:t>
             </a:fld>
             <a:endParaRPr lang="en-US"/>
           </a:p>
@@ -1739,7 +1740,7 @@
           <a:lstStyle/>
           <a:p>
             <a:fld id="{EB1FAE4C-5332-014D-8E1B-BB8DA73EF81D}" type="datetimeFigureOut">
-              <a:t>4/13/22</a:t>
+              <a:t>5/5/22</a:t>
             </a:fld>
             <a:endParaRPr lang="en-US"/>
           </a:p>
@@ -1969,7 +1970,7 @@
           <a:lstStyle/>
           <a:p>
             <a:fld id="{EB1FAE4C-5332-014D-8E1B-BB8DA73EF81D}" type="datetimeFigureOut">
-              <a:t>4/13/22</a:t>
+              <a:t>5/5/22</a:t>
             </a:fld>
             <a:endParaRPr lang="en-US"/>
           </a:p>
@@ -2334,7 +2335,7 @@
           <a:lstStyle/>
           <a:p>
             <a:fld id="{EB1FAE4C-5332-014D-8E1B-BB8DA73EF81D}" type="datetimeFigureOut">
-              <a:t>4/13/22</a:t>
+              <a:t>5/5/22</a:t>
             </a:fld>
             <a:endParaRPr lang="en-US"/>
           </a:p>
@@ -2452,7 +2453,7 @@
           <a:lstStyle/>
           <a:p>
             <a:fld id="{EB1FAE4C-5332-014D-8E1B-BB8DA73EF81D}" type="datetimeFigureOut">
-              <a:t>4/13/22</a:t>
+              <a:t>5/5/22</a:t>
             </a:fld>
             <a:endParaRPr lang="en-US"/>
           </a:p>
@@ -2548,7 +2549,7 @@
           <a:lstStyle/>
           <a:p>
             <a:fld id="{EB1FAE4C-5332-014D-8E1B-BB8DA73EF81D}" type="datetimeFigureOut">
-              <a:t>4/13/22</a:t>
+              <a:t>5/5/22</a:t>
             </a:fld>
             <a:endParaRPr lang="en-US"/>
           </a:p>
@@ -2823,7 +2824,7 @@
           <a:lstStyle/>
           <a:p>
             <a:fld id="{EB1FAE4C-5332-014D-8E1B-BB8DA73EF81D}" type="datetimeFigureOut">
-              <a:t>4/13/22</a:t>
+              <a:t>5/5/22</a:t>
             </a:fld>
             <a:endParaRPr lang="en-US"/>
           </a:p>
@@ -3079,7 +3080,7 @@
           <a:lstStyle/>
           <a:p>
             <a:fld id="{EB1FAE4C-5332-014D-8E1B-BB8DA73EF81D}" type="datetimeFigureOut">
-              <a:t>4/13/22</a:t>
+              <a:t>5/5/22</a:t>
             </a:fld>
             <a:endParaRPr lang="en-US"/>
           </a:p>
@@ -3291,7 +3292,7 @@
           </a:lstStyle>
           <a:p>
             <a:fld id="{EB1FAE4C-5332-014D-8E1B-BB8DA73EF81D}" type="datetimeFigureOut">
-              <a:t>4/13/22</a:t>
+              <a:t>5/5/22</a:t>
             </a:fld>
             <a:endParaRPr lang="en-US"/>
           </a:p>
@@ -3790,7 +3791,7 @@
         <p:spPr>
           <a:xfrm>
             <a:off x="4180888" y="3262964"/>
-            <a:ext cx="5161896" cy="1200329"/>
+            <a:ext cx="5161896" cy="1754326"/>
           </a:xfrm>
           <a:prstGeom prst="rect">
             <a:avLst/>
@@ -3840,6 +3841,26 @@
             <a:r>
               <a:rPr lang="en-US" b="1"/>
               <a:t>Bitcoin history</a:t>
+            </a:r>
+          </a:p>
+          <a:p>
+            <a:pPr marL="380990" indent="-380990">
+              <a:buFont typeface="Arial" panose="020B0604020202020204" pitchFamily="34" charset="0"/>
+              <a:buChar char="•"/>
+            </a:pPr>
+            <a:r>
+              <a:rPr lang="en-US" b="1"/>
+              <a:t>Electricity usage</a:t>
+            </a:r>
+          </a:p>
+          <a:p>
+            <a:pPr marL="380990" indent="-380990">
+              <a:buFont typeface="Arial" panose="020B0604020202020204" pitchFamily="34" charset="0"/>
+              <a:buChar char="•"/>
+            </a:pPr>
+            <a:r>
+              <a:rPr lang="en-US" b="1"/>
+              <a:t>Look into the future</a:t>
             </a:r>
           </a:p>
         </p:txBody>
@@ -5376,6 +5397,234 @@
     <p:extLst>
       <p:ext uri="{BB962C8B-B14F-4D97-AF65-F5344CB8AC3E}">
         <p14:creationId xmlns:p14="http://schemas.microsoft.com/office/powerpoint/2010/main" val="4172791570"/>
+      </p:ext>
+    </p:extLst>
+  </p:cSld>
+  <p:clrMapOvr>
+    <a:masterClrMapping/>
+  </p:clrMapOvr>
+</p:sld>
+</file>
+
+<file path=ppt/slides/slide15.xml><?xml version="1.0" encoding="utf-8"?>
+<p:sld xmlns:a="http://schemas.openxmlformats.org/drawingml/2006/main" xmlns:r="http://schemas.openxmlformats.org/officeDocument/2006/relationships" xmlns:p="http://schemas.openxmlformats.org/presentationml/2006/main">
+  <p:cSld>
+    <p:spTree>
+      <p:nvGrpSpPr>
+        <p:cNvPr id="1" name=""/>
+        <p:cNvGrpSpPr/>
+        <p:nvPr/>
+      </p:nvGrpSpPr>
+      <p:grpSpPr>
+        <a:xfrm>
+          <a:off x="0" y="0"/>
+          <a:ext cx="0" cy="0"/>
+          <a:chOff x="0" y="0"/>
+          <a:chExt cx="0" cy="0"/>
+        </a:xfrm>
+      </p:grpSpPr>
+      <p:sp>
+        <p:nvSpPr>
+          <p:cNvPr id="2" name="TextBox 1">
+            <a:extLst>
+              <a:ext uri="{FF2B5EF4-FFF2-40B4-BE49-F238E27FC236}">
+                <a16:creationId xmlns:a16="http://schemas.microsoft.com/office/drawing/2014/main" id="{B99FD3BE-2BB9-B1CD-502B-C57EA370D128}"/>
+              </a:ext>
+            </a:extLst>
+          </p:cNvPr>
+          <p:cNvSpPr txBox="1"/>
+          <p:nvPr/>
+        </p:nvSpPr>
+        <p:spPr>
+          <a:xfrm>
+            <a:off x="2097156" y="1719468"/>
+            <a:ext cx="7633253" cy="3108543"/>
+          </a:xfrm>
+          <a:prstGeom prst="rect">
+            <a:avLst/>
+          </a:prstGeom>
+          <a:noFill/>
+        </p:spPr>
+        <p:txBody>
+          <a:bodyPr wrap="square" rtlCol="0">
+            <a:spAutoFit/>
+          </a:bodyPr>
+          <a:lstStyle/>
+          <a:p>
+            <a:pPr marL="285750" indent="-285750">
+              <a:buFont typeface="Arial" panose="020B0604020202020204" pitchFamily="34" charset="0"/>
+              <a:buChar char="•"/>
+            </a:pPr>
+            <a:r>
+              <a:rPr lang="en-US" sz="1400"/>
+              <a:t>Bitcoin launched in 2009</a:t>
+            </a:r>
+          </a:p>
+          <a:p>
+            <a:pPr marL="285750" indent="-285750">
+              <a:buFont typeface="Arial" panose="020B0604020202020204" pitchFamily="34" charset="0"/>
+              <a:buChar char="•"/>
+            </a:pPr>
+            <a:r>
+              <a:rPr lang="en-US" sz="1400"/>
+              <a:t>Ethereum went live in 2015</a:t>
+            </a:r>
+          </a:p>
+          <a:p>
+            <a:pPr marL="285750" indent="-285750">
+              <a:buFont typeface="Arial" panose="020B0604020202020204" pitchFamily="34" charset="0"/>
+              <a:buChar char="•"/>
+            </a:pPr>
+            <a:r>
+              <a:rPr lang="en-US" sz="1400"/>
+              <a:t>Currently (2022) there are tens of independent blockchains / networks </a:t>
+            </a:r>
+            <a:br>
+              <a:rPr lang="en-US" sz="1400"/>
+            </a:br>
+            <a:r>
+              <a:rPr lang="en-US" sz="1400"/>
+              <a:t>and tens of thousands of coins/tokens</a:t>
+            </a:r>
+          </a:p>
+          <a:p>
+            <a:pPr marL="285750" indent="-285750">
+              <a:buFont typeface="Arial" panose="020B0604020202020204" pitchFamily="34" charset="0"/>
+              <a:buChar char="•"/>
+            </a:pPr>
+            <a:r>
+              <a:rPr lang="en-US" sz="1400"/>
+              <a:t>There are multiple centalized and decentralized crypto exchanges</a:t>
+            </a:r>
+          </a:p>
+          <a:p>
+            <a:pPr marL="285750" indent="-285750">
+              <a:buFont typeface="Arial" panose="020B0604020202020204" pitchFamily="34" charset="0"/>
+              <a:buChar char="•"/>
+            </a:pPr>
+            <a:r>
+              <a:rPr lang="en-US" sz="1400"/>
+              <a:t>There are 100+ types of wallets</a:t>
+            </a:r>
+          </a:p>
+          <a:p>
+            <a:pPr marL="285750" indent="-285750">
+              <a:buFont typeface="Arial" panose="020B0604020202020204" pitchFamily="34" charset="0"/>
+              <a:buChar char="•"/>
+            </a:pPr>
+            <a:r>
+              <a:rPr lang="en-US" sz="1400"/>
+              <a:t>Modern networks are "green" - use Proof-of-Stake or other methods to reduce electricity usage</a:t>
+            </a:r>
+          </a:p>
+          <a:p>
+            <a:pPr marL="285750" indent="-285750">
+              <a:buFont typeface="Arial" panose="020B0604020202020204" pitchFamily="34" charset="0"/>
+              <a:buChar char="•"/>
+            </a:pPr>
+            <a:r>
+              <a:rPr lang="en-US" sz="1400"/>
+              <a:t>There are multiple "layer-2" technologies allowing fast, cheap, and "green" transactions</a:t>
+            </a:r>
+          </a:p>
+          <a:p>
+            <a:pPr marL="285750" indent="-285750">
+              <a:buFont typeface="Arial" panose="020B0604020202020204" pitchFamily="34" charset="0"/>
+              <a:buChar char="•"/>
+            </a:pPr>
+            <a:r>
+              <a:rPr lang="en-US" sz="1400"/>
+              <a:t>Decentralized "Liquidity Pools" can be used as investment and allow cross-chain transactions</a:t>
+            </a:r>
+          </a:p>
+          <a:p>
+            <a:pPr marL="285750" indent="-285750">
+              <a:buFont typeface="Arial" panose="020B0604020202020204" pitchFamily="34" charset="0"/>
+              <a:buChar char="•"/>
+            </a:pPr>
+            <a:r>
+              <a:rPr lang="en-US" sz="1400"/>
+              <a:t>Stable coins serve as buffered crypto currencies (to reduce volatility)</a:t>
+            </a:r>
+          </a:p>
+          <a:p>
+            <a:pPr marL="285750" indent="-285750">
+              <a:buFont typeface="Arial" panose="020B0604020202020204" pitchFamily="34" charset="0"/>
+              <a:buChar char="•"/>
+            </a:pPr>
+            <a:r>
+              <a:rPr lang="en-US" sz="1400"/>
+              <a:t>Algorithm-backed stable coins serve as central banks (injecting coins into platforms as needed)</a:t>
+            </a:r>
+          </a:p>
+          <a:p>
+            <a:pPr marL="285750" indent="-285750">
+              <a:buFont typeface="Arial" panose="020B0604020202020204" pitchFamily="34" charset="0"/>
+              <a:buChar char="•"/>
+            </a:pPr>
+            <a:r>
+              <a:rPr lang="en-US" sz="1400"/>
+              <a:t>Futures and other derivatives instruments exists on top of crypto</a:t>
+            </a:r>
+          </a:p>
+          <a:p>
+            <a:pPr marL="285750" indent="-285750">
+              <a:buFont typeface="Arial" panose="020B0604020202020204" pitchFamily="34" charset="0"/>
+              <a:buChar char="•"/>
+            </a:pPr>
+            <a:r>
+              <a:rPr lang="en-US" sz="1400"/>
+              <a:t>Decentralized Finance (DeFi) slowly takes over all banking functions </a:t>
+            </a:r>
+            <a:br>
+              <a:rPr lang="en-US" sz="1400"/>
+            </a:br>
+            <a:r>
+              <a:rPr lang="en-US" sz="1400"/>
+              <a:t>(saving, transfering, paying, investing, lending)</a:t>
+            </a:r>
+          </a:p>
+        </p:txBody>
+      </p:sp>
+      <p:sp>
+        <p:nvSpPr>
+          <p:cNvPr id="3" name="TextBox 2">
+            <a:extLst>
+              <a:ext uri="{FF2B5EF4-FFF2-40B4-BE49-F238E27FC236}">
+                <a16:creationId xmlns:a16="http://schemas.microsoft.com/office/drawing/2014/main" id="{B637AA78-5767-69BA-CCCD-E4BAC213DCA0}"/>
+              </a:ext>
+            </a:extLst>
+          </p:cNvPr>
+          <p:cNvSpPr txBox="1"/>
+          <p:nvPr/>
+        </p:nvSpPr>
+        <p:spPr>
+          <a:xfrm>
+            <a:off x="0" y="57539"/>
+            <a:ext cx="4611757" cy="523220"/>
+          </a:xfrm>
+          <a:prstGeom prst="rect">
+            <a:avLst/>
+          </a:prstGeom>
+          <a:noFill/>
+        </p:spPr>
+        <p:txBody>
+          <a:bodyPr wrap="square" rtlCol="0">
+            <a:spAutoFit/>
+          </a:bodyPr>
+          <a:lstStyle/>
+          <a:p>
+            <a:r>
+              <a:rPr lang="en-US" sz="2800" b="1"/>
+              <a:t>What is Next</a:t>
+            </a:r>
+          </a:p>
+        </p:txBody>
+      </p:sp>
+    </p:spTree>
+    <p:extLst>
+      <p:ext uri="{BB962C8B-B14F-4D97-AF65-F5344CB8AC3E}">
+        <p14:creationId xmlns:p14="http://schemas.microsoft.com/office/powerpoint/2010/main" val="1584975187"/>
       </p:ext>
     </p:extLst>
   </p:cSld>

--- a/crypto_01_intro.pptx
+++ b/crypto_01_intro.pptx
@@ -5494,7 +5494,7 @@
             </a:pPr>
             <a:r>
               <a:rPr lang="en-US" sz="1400"/>
-              <a:t>There are multiple centalized and decentralized crypto exchanges</a:t>
+              <a:t>There are multiple centralized and decentralized crypto exchanges</a:t>
             </a:r>
           </a:p>
           <a:p>
